--- a/docs/Presentation-2026-May/BIMGUARD_FMP_C_Architectural_Analysis.pptx
+++ b/docs/Presentation-2026-May/BIMGUARD_FMP_C_Architectural_Analysis.pptx
@@ -12745,7 +12745,7 @@
                 </a:solidFill>
                 <a:latin typeface="Calibri"/>
               </a:rPr>
-              <a:t>Standard and clause that set the threshold</a:t>
+              <a:t>Standard and clause governing the requirement</a:t>
             </a:r>
           </a:p>
         </p:txBody>
